--- a/docs/presentacion/DroneMission-Pro-Vistas.pptx
+++ b/docs/presentacion/DroneMission-Pro-Vistas.pptx
@@ -10428,8 +10428,8 @@
         </p:blipFill>
         <p:spPr>
           <a:xfrm>
-            <a:off x="4745108" y="1330000"/>
-            <a:ext cx="2693044" cy="5300000"/>
+            <a:off x="4860480" y="1330000"/>
+            <a:ext cx="2462300" cy="5300000"/>
           </a:xfrm>
           <a:prstGeom prst="rect">
             <a:avLst/>
